--- a/docs/DaoTao/Buoi03_SuaDuLieuAnToan.pptx
+++ b/docs/DaoTao/Buoi03_SuaDuLieuAnToan.pptx
@@ -515,7 +515,7 @@
           </a:p>
           <a:p>
             <a:r>
-              <a:t>Chuẩn bị: Dự án thử; KHÔNG dùng database khách.</a:t>
+              <a:t>Chuẩn bị: Dự án thử; KHÔNG dùng database của khách.</a:t>
             </a:r>
           </a:p>
           <a:p>
@@ -715,27 +715,27 @@
           <a:lstStyle/>
           <a:p>
             <a:r>
-              <a:t>Đây là slide quan trọng nhất của chương 2. Dữ liệu khách là dữ liệu kế toán thật.</a:t>
-            </a:r>
-          </a:p>
-          <a:p>
-            <a:r>
-              <a:t>Quy tắc 5 bước: SELECT trước với đúng WHERE để biết sẽ ảnh hưởng bao nhiêu dòng; sao lưu các dòng đó ra bảng phụ có ngày trong tên (zbk_dmkh_20261027); mở transaction rồi chạy câu sửa; kiểm tra @@ROWCOUNT có khớp và SELECT lại; cuối cùng COMMIT nếu đúng, ROLLBACK nếu sai.</a:t>
-            </a:r>
-          </a:p>
-          <a:p>
-            <a:r>
-              <a:t>Ví dụ: chuyển khách của nhân viên NV01 sang NV02. Bước 1 đếm được 12 dòng; bước 3–5 gói trong một lần chạy: số dòng bị sửa khác 12 thì tự ROLLBACK. Nhớ cập nhật datetime2 để giữ dấu vết. Muốn khôi phục: UPDATE ngược từ bảng zbk.</a:t>
-            </a:r>
-          </a:p>
-          <a:p>
-            <a:r>
-              <a:t>Không để transaction treo: nó khoá bảng, người dùng khác bị đứng màn hình.</a:t>
-            </a:r>
-          </a:p>
-          <a:p>
-            <a:r>
-              <a:t>Lưu ý Bcode: tab SQL Query mặc định Reset Connection sau mỗi lần chạy, nên nếu BEGIN TRAN và COMMIT ở hai lần bấm F5 khác nhau thì phải bật Giữ kết nối (⚙ Tùy chọn).</a:t>
+              <a:t>Đây là slide quan trọng nhất của chương 2. Dữ liệu của khách là dữ liệu kế toán thật, sửa sai là ảnh hưởng tới sổ sách.</a:t>
+            </a:r>
+          </a:p>
+          <a:p>
+            <a:r>
+              <a:t>Quy tắc 5 bước: (1) SELECT trước với đúng điều kiện WHERE sẽ dùng, để biết câu sửa sẽ ảnh hưởng bao nhiêu dòng; (2) sao lưu các dòng đó ra một bảng phụ có ngày trong tên (ví dụ zbk_dmkh_20261027); (3) mở transaction rồi mới chạy câu sửa; (4) kiểm tra @@ROWCOUNT có khớp số dòng đã đếm và SELECT lại để xem kết quả; (5) cuối cùng COMMIT nếu đúng, ROLLBACK nếu sai.</a:t>
+            </a:r>
+          </a:p>
+          <a:p>
+            <a:r>
+              <a:t>Ví dụ trên slide: chuyển các khách hàng của nhân viên NV01 sang NV02. Bước 1 đếm được 12 dòng; bước 3 đến 5 gói trong một lần chạy: nếu số dòng bị sửa khác 12 thì tự ROLLBACK. Nhớ cập nhật datetime2 để giữ dấu vết lần sửa. Muốn khôi phục thì UPDATE ngược lại từ bảng zbk.</a:t>
+            </a:r>
+          </a:p>
+          <a:p>
+            <a:r>
+              <a:t>Không để transaction treo (đã mở mà chưa COMMIT hay ROLLBACK): nó giữ khoá trên bảng, người dùng khác sẽ bị đứng màn hình.</a:t>
+            </a:r>
+          </a:p>
+          <a:p>
+            <a:r>
+              <a:t>Lưu ý khi dùng Bcode: tab SQL Query mặc định Reset Connection (đặt lại kết nối) sau mỗi lần chạy, nên nếu BEGIN TRAN và COMMIT nằm ở hai lần bấm F5 khác nhau thì phải bật Giữ kết nối (trong ⚙ Tùy chọn).</a:t>
             </a:r>
           </a:p>
         </p:txBody>
@@ -805,32 +805,32 @@
           <a:lstStyle/>
           <a:p>
             <a:r>
-              <a:t>Ba cách giữ dữ liệu trung gian.</a:t>
-            </a:r>
-          </a:p>
-          <a:p>
-            <a:r>
-              <a:t>Bảng tạm #: dùng nhiều nhất trong procedure Fast; sống tới hết kết nối hoặc hết procedure; tạo index được.</a:t>
-            </a:r>
-          </a:p>
-          <a:p>
-            <a:r>
-              <a:t>Biến bảng @: nhỏ, sống trong một batch, không bị ROLLBACK.</a:t>
-            </a:r>
-          </a:p>
-          <a:p>
-            <a:r>
-              <a:t>CTE: đặt tên cho truy vấn con, kết hợp ROW_NUMBER để tìm bản trùng hoặc lấy dòng mới nhất.</a:t>
-            </a:r>
-          </a:p>
-          <a:p>
-            <a:r>
-              <a:t>Mẹo Fast: SELECT TOP 0 ... INTO #report FROM bảng thật để tạo bảng tạm đúng kiểu cột (tránh cả lỗi collation khi JOIN).</a:t>
-            </a:r>
-          </a:p>
-          <a:p>
-            <a:r>
-              <a:t>Nhắc: test procedure thì đừng tự tạo trước bảng tạm trùng tên bảng tạm procedure dùng bên trong — sẽ ra lỗi Invalid column name (buổi 9).</a:t>
+              <a:t>Ba cách giữ dữ liệu trung gian trong SQL.</a:t>
+            </a:r>
+          </a:p>
+          <a:p>
+            <a:r>
+              <a:t>Bảng tạm (tên bắt đầu bằng #): dùng nhiều nhất trong procedure của Fast; tồn tại tới khi hết kết nối hoặc hết procedure; tạo được index.</a:t>
+            </a:r>
+          </a:p>
+          <a:p>
+            <a:r>
+              <a:t>Biến bảng (tên bắt đầu bằng @): dùng cho dữ liệu nhỏ, chỉ tồn tại trong một batch, và không bị ROLLBACK làm mất dữ liệu.</a:t>
+            </a:r>
+          </a:p>
+          <a:p>
+            <a:r>
+              <a:t>CTE: đặt tên cho một truy vấn con; kết hợp với ROW_NUMBER để tìm bản ghi trùng hoặc lấy dòng mới nhất.</a:t>
+            </a:r>
+          </a:p>
+          <a:p>
+            <a:r>
+              <a:t>Mẹo của Fast: SELECT TOP 0 ... INTO #report FROM bảng thật để tạo bảng tạm có đúng kiểu cột (tránh được cả lỗi collation khi JOIN).</a:t>
+            </a:r>
+          </a:p>
+          <a:p>
+            <a:r>
+              <a:t>Nhắc trước: khi test một procedure, đừng tự tạo sẵn bảng tạm trùng tên với bảng tạm mà procedure dùng bên trong — sẽ gặp lỗi Invalid column name (xem buổi 9).</a:t>
             </a:r>
           </a:p>
         </p:txBody>
@@ -900,32 +900,32 @@
           <a:lstStyle/>
           <a:p>
             <a:r>
-              <a:t>Tab Table (Ctrl+Shift+T): gõ tên bảng, Where, Order, Top → Enter. Sửa ô như Excel, rời dòng là tự lưu. F4 thêm dòng, F8 xoá (ghi ngay), F1 xem chi tiết.</a:t>
-            </a:r>
-          </a:p>
-          <a:p>
-            <a:r>
-              <a:t>Dòng Menu dưới ô Where cho biết màn hình nào dùng bảng này — bấm để nhảy tới menu.</a:t>
-            </a:r>
-          </a:p>
-          <a:p>
-            <a:r>
-              <a:t>Chuột phải tab Structure: Gen Add Column / Gen Alter Column — với bảng phân kỳ sinh sẵn lệnh cho mọi kỳ. Chuột phải ô Table → Check Partitions Struct.</a:t>
-            </a:r>
-          </a:p>
-          <a:p>
-            <a:r>
-              <a:t>Cây SQL Object: lọc theo tên, double-click mở code, chuột phải Mở dạng ALTER, Ai đang dùng object này (Ctrl+Alt+U) — bắt buộc xem trước khi sửa / xoá.</a:t>
-            </a:r>
-          </a:p>
-          <a:p>
-            <a:r>
-              <a:t>Lookup (Ctrl+Shift+L): tìm object theo tên hoặc theo nội dung code — cách nhanh nhất để biết procedure nào cập nhật một bảng / cột.</a:t>
-            </a:r>
-          </a:p>
-          <a:p>
-            <a:r>
-              <a:t>Cảnh báo: bảng không có khoá chính thì không lưu / xoá an toàn; bảng $000000 chỉ để xem.</a:t>
+              <a:t>Tab Table (Ctrl+Shift+T): gõ tên bảng, điều kiện Where, Order, Top rồi bấm Enter. Sửa ô như trong Excel, rời khỏi dòng là tự lưu. F4 thêm dòng, F8 xoá dòng (ghi xuống database ngay), F1 xem chi tiết.</a:t>
+            </a:r>
+          </a:p>
+          <a:p>
+            <a:r>
+              <a:t>Dòng Menu nằm dưới ô Where cho biết những màn hình nào dùng bảng này — bấm vào để nhảy tới menu đó.</a:t>
+            </a:r>
+          </a:p>
+          <a:p>
+            <a:r>
+              <a:t>Chuột phải tab Structure: Gen Add Column / Gen Alter Column — với bảng phân kỳ, Bcode sinh sẵn lệnh cho mọi kỳ. Chuột phải ô Table → Check Partitions Struct để kiểm tra cấu trúc các kỳ.</a:t>
+            </a:r>
+          </a:p>
+          <a:p>
+            <a:r>
+              <a:t>Cây SQL Object: lọc theo tên, double-click để mở code, chuột phải chọn Mở dạng ALTER, hoặc Ai đang dùng object này (Ctrl+Alt+U) — bắt buộc xem trước khi sửa hoặc xoá object.</a:t>
+            </a:r>
+          </a:p>
+          <a:p>
+            <a:r>
+              <a:t>Lookup (Ctrl+Shift+L): tìm object theo tên hoặc theo nội dung code — cách nhanh nhất để biết procedure nào cập nhật một bảng hay một cột.</a:t>
+            </a:r>
+          </a:p>
+          <a:p>
+            <a:r>
+              <a:t>Cảnh báo: bảng không có khoá chính thì không lưu / xoá dòng một cách an toàn được; bảng $000000 chỉ để xem.</a:t>
             </a:r>
           </a:p>
         </p:txBody>
@@ -995,22 +995,22 @@
           <a:lstStyle/>
           <a:p>
             <a:r>
-              <a:t>Cây SQL Object ở cột icon trái: nhóm Tables, Views, Stored Procedures, Functions, Triggers; bảng phân kỳ được ẩn. Gõ vào ô lọc là lọc ngay.</a:t>
-            </a:r>
-          </a:p>
-          <a:p>
-            <a:r>
-              <a:t>Double-click procedure mở ở tab SQL dạng DROP / CREATE; khi sửa nên chuột phải → Mở dạng ALTER.</a:t>
-            </a:r>
-          </a:p>
-          <a:p>
-            <a:r>
-              <a:t>Ai đang dùng object này (Ctrl+Alt+U): liệt kê procedure khác và file controller (Dir, Filter, Grid, Include, Report) có dùng — bắt buộc xem trước khi sửa hoặc xoá.</a:t>
-            </a:r>
-          </a:p>
-          <a:p>
-            <a:r>
-              <a:t>So sánh object (Ctrl+Shift+J): so code giữa 2 database (bản dev ↔ bản khách), lọc khác nhau / chỉ bên trái / phải, sinh script ALTER (không tự chạy).</a:t>
+              <a:t>Cây SQL Object nằm ở cột icon bên trái, chia nhóm Tables, Views, Stored Procedures, Functions, Triggers; các bảng phân kỳ được ẩn đi cho gọn. Gõ vào ô lọc là danh sách lọc ngay.</a:t>
+            </a:r>
+          </a:p>
+          <a:p>
+            <a:r>
+              <a:t>Double-click một procedure sẽ mở nó trong tab SQL ở dạng DROP / CREATE; khi cần sửa thì nên chuột phải → Mở dạng ALTER.</a:t>
+            </a:r>
+          </a:p>
+          <a:p>
+            <a:r>
+              <a:t>Ai đang dùng object này (Ctrl+Alt+U): liệt kê các procedure khác và các file controller (Dir, Filter, Grid, Include, Report) có dùng object này — bắt buộc xem trước khi sửa hoặc xoá.</a:t>
+            </a:r>
+          </a:p>
+          <a:p>
+            <a:r>
+              <a:t>So sánh object (Ctrl+Shift+J): so sánh code giữa 2 database (ví dụ bản dev với bản của khách), lọc theo: khác nhau / chỉ có ở bên trái / chỉ có ở bên phải, và sinh script ALTER (Bcode không tự chạy script này).</a:t>
             </a:r>
           </a:p>
         </p:txBody>
@@ -1080,17 +1080,17 @@
           <a:lstStyle/>
           <a:p>
             <a:r>
-              <a:t>Profiler: khi không biết màn hình gọi procedure nào. Ctrl+3, khai đường dẫn Profiler, đăng nhập, Bung &amp; Đăng nhập. Lọc theo user để đỡ nhiễu. Làm thao tác trên web, tìm dòng exec, copy câu lệnh sang SQL Query để chạy lại với cùng tham số. Profiler làm chậm server — chỉ bật đúng lúc cần.</a:t>
-            </a:r>
-          </a:p>
-          <a:p>
-            <a:r>
-              <a:t>Script Cart: giỏ gom script để đóng gói. Ở tab Table, Add Script sinh DELETE + nạp lại toàn bộ dòng đang xem. Cảnh báo: nếu số dòng đang xem bằng đúng Top thì phần còn lại sẽ mất khi chạy script — đặt Top = 0.</a:t>
-            </a:r>
-          </a:p>
-          <a:p>
-            <a:r>
-              <a:t>Gen Insert / Update: chuột phải các dòng trên lưới để sinh câu INSERT / UPDATE. Gen Update (Result) sinh UPDATE cho cả bảng kết quả gần nhất.</a:t>
+              <a:t>SQL Profiler: dùng khi không biết màn hình đang gọi procedure nào. Bấm Ctrl+3, khai báo đường dẫn Profiler, đăng nhập, bấm Bung &amp; Đăng nhập. Lọc theo user để bớt các câu lệnh không liên quan. Thao tác trên web, tìm dòng exec tương ứng, copy câu lệnh sang SQL Query để chạy lại với đúng các tham số đó. Profiler làm chậm server — chỉ bật đúng lúc cần.</a:t>
+            </a:r>
+          </a:p>
+          <a:p>
+            <a:r>
+              <a:t>Script Cart: giỏ gom các script lại để đóng gói. Ở tab Table, Add Script sinh câu DELETE rồi nạp lại toàn bộ các dòng đang xem. Cảnh báo: nếu số dòng đang xem bằng đúng giá trị Top thì có thể bảng còn nhiều dòng hơn; khi chạy script, các dòng không nằm trong lưới sẽ bị mất — vì vậy đặt Top = 0 (lấy hết) rồi Load lại trước khi Add Script.</a:t>
+            </a:r>
+          </a:p>
+          <a:p>
+            <a:r>
+              <a:t>Gen Insert / Update: chọn các dòng trên lưới, chuột phải để sinh câu INSERT hoặc UPDATE. Gen Update (Result) sinh câu UPDATE cho cả bảng kết quả gần nhất. Bcode sẽ hỏi bảng đích và cột khoá, câu lệnh sinh ra được chép vào clipboard.</a:t>
             </a:r>
           </a:p>
         </p:txBody>
@@ -1165,7 +1165,7 @@
           </a:p>
           <a:p>
             <a:r>
-              <a:t>Bài tập về nhà: Viết script thêm 1 cột cho một bảng phân kỳ bằng Gen Add Column, chạy trên dự án thử, kiểm tra Check Partitions Struct.</a:t>
+              <a:t>Bài tập về nhà: Viết script thêm 1 cột cho một bảng phân kỳ bằng Gen Add Column, chạy trên dự án thử, rồi kiểm tra bằng Check Partitions Struct.</a:t>
             </a:r>
           </a:p>
         </p:txBody>
@@ -1240,22 +1240,22 @@
           </a:p>
           <a:p>
             <a:r>
-              <a:t>1. SELECT đếm → sao lưu → BEGIN TRAN + sửa → kiểm @@ROWCOUNT / SELECT lại → COMMIT hoặc ROLLBACK.</a:t>
-            </a:r>
-          </a:p>
-          <a:p>
-            <a:r>
-              <a:t>2. SQL Query mặc định Reset Connection sau mỗi lần chạy — transaction bị huỷ / treo.</a:t>
-            </a:r>
-          </a:p>
-          <a:p>
-            <a:r>
-              <a:t>3. Phần dữ liệu còn lại sẽ mất khi chạy script — đặt Top = 0 rồi Load lại.</a:t>
-            </a:r>
-          </a:p>
-          <a:p>
-            <a:r>
-              <a:t>4. Thêm cho mọi kỳ, đúng thứ tự cột — dùng Gen Add Column, kiểm bằng Check Partitions Struct.</a:t>
+              <a:t>1. SELECT đếm số dòng; sao lưu; BEGIN TRAN rồi sửa; kiểm @@ROWCOUNT hoặc SELECT lại; COMMIT hoặc ROLLBACK.</a:t>
+            </a:r>
+          </a:p>
+          <a:p>
+            <a:r>
+              <a:t>2. SQL Query mặc định Reset Connection sau mỗi lần chạy, nên transaction bị huỷ hoặc bị treo.</a:t>
+            </a:r>
+          </a:p>
+          <a:p>
+            <a:r>
+              <a:t>3. Phần dữ liệu chưa tải lên sẽ bị mất khi chạy script; hãy đặt Top = 0 rồi Load lại.</a:t>
+            </a:r>
+          </a:p>
+          <a:p>
+            <a:r>
+              <a:t>4. Phải thêm cho mọi kỳ, đúng thứ tự cột: dùng Gen Add Column rồi kiểm tra bằng Check Partitions Struct.</a:t>
             </a:r>
           </a:p>
         </p:txBody>
@@ -5586,7 +5586,7 @@
                 <a:ea typeface="Segoe UI"/>
                 <a:cs typeface="Segoe UI"/>
               </a:rPr>
-              <a:t> Chuẩn bị: Dự án thử; KHÔNG dùng database khách</a:t>
+              <a:t> Chuẩn bị: Dự án thử; KHÔNG dùng database của khách</a:t>
             </a:r>
           </a:p>
         </p:txBody>
@@ -5931,7 +5931,7 @@
                 <a:ea typeface="Segoe UI"/>
                 <a:cs typeface="Segoe UI"/>
               </a:rPr>
-              <a:t>cùng WHERE, đếm dòng</a:t>
+              <a:t>cùng WHERE, đếm số dòng</a:t>
             </a:r>
           </a:p>
         </p:txBody>
@@ -6583,7 +6583,7 @@
                 <a:ea typeface="Segoe UI"/>
                 <a:cs typeface="Segoe UI"/>
               </a:rPr>
-              <a:t>COMMIT / ROLLBACK</a:t>
+              <a:t>COMMIT hoặc ROLLBACK</a:t>
             </a:r>
           </a:p>
         </p:txBody>
@@ -7246,7 +7246,7 @@
                 <a:ea typeface="Segoe UI"/>
                 <a:cs typeface="Segoe UI"/>
               </a:rPr>
-              <a:t>Bcode: TRAN và COMMIT ở 2 lần F5 → bật </a:t>
+              <a:t>Bcode: BEGIN TRAN và COMMIT ở 2 lần F5 → bật </a:t>
             </a:r>
             <a:r>
               <a:rPr sz="1700" b="1" i="0">
@@ -8359,7 +8359,7 @@
                 <a:ea typeface="Segoe UI"/>
                 <a:cs typeface="Segoe UI"/>
               </a:rPr>
-              <a:t> — dùng trong procedure</a:t>
+              <a:t> — dùng nhiều trong procedure</a:t>
             </a:r>
           </a:p>
           <a:p>
@@ -8399,7 +8399,7 @@
                 <a:ea typeface="Segoe UI"/>
                 <a:cs typeface="Segoe UI"/>
               </a:rPr>
-              <a:t> — nhỏ, 1 batch</a:t>
+              <a:t> — dữ liệu nhỏ, trong 1 batch</a:t>
             </a:r>
           </a:p>
           <a:p>
@@ -8450,7 +8450,7 @@
                 <a:ea typeface="Segoe UI"/>
                 <a:cs typeface="Segoe UI"/>
               </a:rPr>
-              <a:t> tìm trùng</a:t>
+              <a:t> tìm bản trùng</a:t>
             </a:r>
           </a:p>
           <a:p>
@@ -8530,7 +8530,7 @@
                 <a:ea typeface="Segoe UI"/>
                 <a:cs typeface="Segoe UI"/>
               </a:rPr>
-              <a:t>Đừng tạo trước </a:t>
+              <a:t>Đừng tạo sẵn </a:t>
             </a:r>
             <a:r>
               <a:rPr sz="1600" b="0" i="0">
@@ -8552,7 +8552,7 @@
                 <a:ea typeface="Segoe UI"/>
                 <a:cs typeface="Segoe UI"/>
               </a:rPr>
-              <a:t> trùng tên của procedure</a:t>
+              <a:t> trùng tên bảng tạm của procedure</a:t>
             </a:r>
           </a:p>
         </p:txBody>
@@ -9463,7 +9463,7 @@
                 <a:ea typeface="Segoe UI"/>
                 <a:cs typeface="Segoe UI"/>
               </a:rPr>
-              <a:t>Gõ lọc theo tên</a:t>
+              <a:t>Gõ để lọc theo tên</a:t>
             </a:r>
           </a:p>
           <a:p>
@@ -9583,7 +9583,7 @@
                 <a:ea typeface="Segoe UI"/>
                 <a:cs typeface="Segoe UI"/>
               </a:rPr>
-              <a:t>Xem trước khi sửa / xoá</a:t>
+              <a:t>Xem trước khi sửa hoặc xoá</a:t>
             </a:r>
           </a:p>
           <a:p>
@@ -10069,7 +10069,7 @@
                 <a:ea typeface="Segoe UI"/>
                 <a:cs typeface="Segoe UI"/>
               </a:rPr>
-              <a:t>Bắt câu lệnh màn hình gửi xuống</a:t>
+              <a:t>Bắt câu lệnh màn hình gửi xuống SQL</a:t>
             </a:r>
           </a:p>
           <a:p>
@@ -10149,7 +10149,7 @@
                 <a:ea typeface="Segoe UI"/>
                 <a:cs typeface="Segoe UI"/>
               </a:rPr>
-              <a:t>Thao tác trên web → tìm </a:t>
+              <a:t>Thao tác trên web → tìm dòng </a:t>
             </a:r>
             <a:r>
               <a:rPr sz="1500" b="0" i="0">
@@ -10432,7 +10432,7 @@
                 <a:ea typeface="Segoe UI"/>
                 <a:cs typeface="Segoe UI"/>
               </a:rPr>
-              <a:t>Table: DELETE + nạp lại dòng đang xem</a:t>
+              <a:t>Ở Table: DELETE + nạp lại các dòng đang xem</a:t>
             </a:r>
           </a:p>
           <a:p>
@@ -10795,7 +10795,7 @@
                 <a:ea typeface="Segoe UI"/>
                 <a:cs typeface="Segoe UI"/>
               </a:rPr>
-              <a:t>Hỏi bảng đích + cột khoá</a:t>
+              <a:t>Hỏi bảng đích và cột khoá</a:t>
             </a:r>
           </a:p>
           <a:p>
@@ -10824,7 +10824,7 @@
                 <a:ea typeface="Segoe UI"/>
                 <a:cs typeface="Segoe UI"/>
               </a:rPr>
-              <a:t>Câu lệnh vào clipboard</a:t>
+              <a:t>Câu lệnh được chép vào clipboard</a:t>
             </a:r>
           </a:p>
         </p:txBody>
@@ -10975,7 +10975,7 @@
                 <a:ea typeface="Segoe UI"/>
                 <a:cs typeface="Segoe UI"/>
               </a:rPr>
-              <a:t>= Top</a:t>
+              <a:t>bằng Top</a:t>
             </a:r>
             <a:r>
               <a:rPr sz="1400" b="0" i="0">
@@ -10986,7 +10986,7 @@
                 <a:ea typeface="Segoe UI"/>
                 <a:cs typeface="Segoe UI"/>
               </a:rPr>
-              <a:t> → phần còn lại </a:t>
+              <a:t> → các dòng còn lại </a:t>
             </a:r>
             <a:r>
               <a:rPr sz="1400" b="1" i="0">
@@ -10997,7 +10997,7 @@
                 <a:ea typeface="Segoe UI"/>
                 <a:cs typeface="Segoe UI"/>
               </a:rPr>
-              <a:t>mất</a:t>
+              <a:t>bị mất</a:t>
             </a:r>
             <a:r>
               <a:rPr sz="1400" b="0" i="0">
@@ -11336,7 +11336,7 @@
                 <a:ea typeface="Segoe UI"/>
                 <a:cs typeface="Segoe UI"/>
               </a:rPr>
-              <a:t> Tìm các tên khách trùng bằng CTE + ROW_NUMBER.</a:t>
+              <a:t> Tìm các khách hàng trùng tên bằng CTE kết hợp ROW_NUMBER.</a:t>
             </a:r>
           </a:p>
           <a:p>
@@ -11398,7 +11398,7 @@
                 <a:ea typeface="Segoe UI"/>
                 <a:cs typeface="Segoe UI"/>
               </a:rPr>
-              <a:t> bằng Lookup; mở một cái bằng </a:t>
+              <a:t> bằng Lookup; mở một procedure bằng </a:t>
             </a:r>
             <a:r>
               <a:rPr sz="2000" b="1" i="0">
@@ -11460,7 +11460,7 @@
                 <a:ea typeface="Segoe UI"/>
                 <a:cs typeface="Segoe UI"/>
               </a:rPr>
-              <a:t> Tab Table mở </a:t>
+              <a:t> Mở </a:t>
             </a:r>
             <a:r>
               <a:rPr sz="1900" b="0" i="0">
@@ -11482,7 +11482,7 @@
                 <a:ea typeface="Segoe UI"/>
                 <a:cs typeface="Segoe UI"/>
               </a:rPr>
-              <a:t> → Add Script → xem trong View Script.</a:t>
+              <a:t> trong tab Table, bấm Add Script rồi xem kết quả trong View Script.</a:t>
             </a:r>
           </a:p>
         </p:txBody>
@@ -11828,7 +11828,7 @@
                 <a:ea typeface="Segoe UI"/>
                 <a:cs typeface="Segoe UI"/>
               </a:rPr>
-              <a:t> Viết script thêm 1 cột cho một bảng phân kỳ bằng Gen Add Column, chạy trên dự án thử, kiểm tra Check Partitions Struct.</a:t>
+              <a:t> Viết script thêm 1 cột cho một bảng phân kỳ bằng Gen Add Column, chạy trên dự án thử, rồi kiểm tra bằng Check Partitions Struct.</a:t>
             </a:r>
           </a:p>
         </p:txBody>
@@ -12116,7 +12116,7 @@
                 <a:ea typeface="Segoe UI"/>
                 <a:cs typeface="Segoe UI"/>
               </a:rPr>
-              <a:t> Năm bước trước khi sửa dữ liệu?</a:t>
+              <a:t> Năm bước khi sửa dữ liệu là gì?</a:t>
             </a:r>
           </a:p>
           <a:p>
@@ -12156,7 +12156,7 @@
                 <a:ea typeface="Segoe UI"/>
                 <a:cs typeface="Segoe UI"/>
               </a:rPr>
-              <a:t> Vì sao phải bật Giữ kết nối khi BEGIN TRAN và COMMIT ở 2 lần F5?</a:t>
+              <a:t> Vì sao phải bật Giữ kết nối khi chạy BEGIN TRAN và COMMIT ở 2 lần F5 khác nhau?</a:t>
             </a:r>
           </a:p>
           <a:p>
@@ -12196,7 +12196,7 @@
                 <a:ea typeface="Segoe UI"/>
                 <a:cs typeface="Segoe UI"/>
               </a:rPr>
-              <a:t> Add Script khi số dòng đang xem = Top thì sao?</a:t>
+              <a:t> Add Script khi số dòng đang xem bằng giá trị Top thì sao?</a:t>
             </a:r>
           </a:p>
           <a:p>
@@ -12236,7 +12236,7 @@
                 <a:ea typeface="Segoe UI"/>
                 <a:cs typeface="Segoe UI"/>
               </a:rPr>
-              <a:t> Thêm cột bảng phân kỳ phải lưu ý gì?</a:t>
+              <a:t> Thêm cột cho bảng phân kỳ phải lưu ý gì?</a:t>
             </a:r>
           </a:p>
         </p:txBody>
